--- a/Storyboarding/NewLectures/13_After_Effects_for_Boards.pptx
+++ b/Storyboarding/NewLectures/13_After_Effects_for_Boards.pptx
@@ -527,7 +527,7 @@
           <a:lstStyle/>
           <a:p>
             <a:r>
-              <a:t>Today is the one class in this course that happens inside a piece of software, and I want to be honest about that up front because it sits oddly against everything else I've told you.</a:t>
+              <a:t>Today is the one class in this course that happens inside a piece of software, worth naming up front because it sits oddly against everything else taught so far.</a:t>
             </a:r>
           </a:p>
           <a:p/>
@@ -539,7 +539,7 @@
           <a:p/>
           <a:p>
             <a:r>
-              <a:t>Five operations. That's the whole session. Then one question at the end that is the actual point.</a:t>
+              <a:t>Five operations. That's the whole session. Then one question at the end that is the point.</a:t>
             </a:r>
           </a:p>
         </p:txBody>
@@ -867,7 +867,7 @@
           <a:lstStyle/>
           <a:p>
             <a:r>
-              <a:t>This is the move that matters, and it's the one you'll actually need in a minute.</a:t>
+              <a:t>This is the move that matters, and it's the one you'll need in a minute.</a:t>
             </a:r>
           </a:p>
           <a:p/>
@@ -973,13 +973,13 @@
           <a:lstStyle/>
           <a:p>
             <a:r>
-              <a:t>A few of you are going to tell me the file I gave you is broken, or that I forgot to separate the layers.</a:t>
+              <a:t>Expect somebody to say the file is broken, or that the layers weren't separated by mistake.</a:t>
             </a:r>
           </a:p>
           <a:p/>
           <a:p>
             <a:r>
-              <a:t>I didn't. It's like that on purpose, because that is the normal condition of this job.</a:t>
+              <a:t>It isn't. It's like that on purpose, because that is the normal condition of this job.</a:t>
             </a:r>
           </a:p>
           <a:p/>
@@ -1519,7 +1519,7 @@
           <a:p/>
           <a:p>
             <a:r>
-              <a:t>This is not a motion graphics course. That course exists, it is taught by someone who knows the program far better than I do, and it is not this. If you want expressions and effects and the graph editor, take it.</a:t>
+              <a:t>This is not a motion graphics course. That course exists, taught by people who know the program in far more depth, and it is not this. If the graph editor, expressions, and effects are the goal, that's a different class.</a:t>
             </a:r>
           </a:p>
           <a:p/>
@@ -1789,7 +1789,7 @@
           <a:p/>
           <a:p>
             <a:r>
-              <a:t>Composition, Retain Layer Sizes gives you layers at their own dimensions with anchor points you can actually work with. That is the one you want.</a:t>
+              <a:t>Composition, Retain Layer Sizes gives you layers at their own dimensions with anchor points you can work with. That is the one you want.</a:t>
             </a:r>
           </a:p>
           <a:p/>
@@ -2047,7 +2047,7 @@
           <a:lstStyle/>
           <a:p>
             <a:r>
-              <a:t>Worth generalising for a second, because this is bigger than one arm.</a:t>
+              <a:t>Worth generalizing for a second, because this is bigger than one arm.</a:t>
             </a:r>
           </a:p>
           <a:p/>
@@ -8726,7 +8726,7 @@
           <a:lstStyle/>
           <a:p>
             <a:r>
-              <a:t>The question this class is actually about</a:t>
+              <a:t>The question this class is about</a:t>
             </a:r>
           </a:p>
         </p:txBody>
